--- a/paper/ACP-Gini_Presentation.pptx
+++ b/paper/ACP-Gini_Presentation.pptx
@@ -10786,7 +10786,7 @@
               </a:defRPr>
             </a:pPr>
             <a:r>
-              <a:t>Hệ số hồi quy có thể bị đảo dấu hoặc có sai số tiêu chuẩn cực lớn, làm cho việc giải thích biến đóng vai trò gì trở nên bất khoa học.</a:t>
+              <a:t>Hệ số hồi quy có thể bị đảo dấu hoặc có sai số tiêu chuẩn cực lớn, làm cho việc giải thích biến đóng vai trò gì trở nên bất khả thi.</a:t>
             </a:r>
           </a:p>
           <a:p>
